--- a/decks/geog-local-place/geog-local-place_ch2_grid-references.pptx
+++ b/decks/geog-local-place/geog-local-place_ch2_grid-references.pptx
@@ -127,30 +127,30 @@
   <p:extLst>
     <p:ext uri="{521415D9-36F7-43E2-AB2F-B90AF26B5E84}">
       <p14:sectionLst xmlns:p14="http://schemas.microsoft.com/office/powerpoint/2010/main">
-        <p14:section name="Opening" id="{1c70dab2-0ee4-b4be-72c5-3db6f88b7de1}">
+        <p14:section name="Opening" id="{de4b44e3-f0af-0fe3-7da3-549b2ef0609f}">
           <p14:sldIdLst>
             <p14:sldId id="256"/>
           </p14:sldIdLst>
         </p14:section>
-        <p14:section name="Gate" id="{bdd89ae5-5ed2-359e-3b5a-a8cc93330ecf}">
+        <p14:section name="Gate" id="{e44ee11b-98cf-ac58-f7c5-c203dec339ce}">
           <p14:sldIdLst>
             <p14:sldId id="257"/>
             <p14:sldId id="258"/>
           </p14:sldIdLst>
         </p14:section>
-        <p14:section name="Pre-teach" id="{ac342af0-6488-2697-8223-adbcd078180d}">
+        <p14:section name="Pre-teach" id="{6f183b34-5d02-511d-14ec-6fdfe6d7421b}">
           <p14:sldIdLst>
             <p14:sldId id="259"/>
             <p14:sldId id="260"/>
           </p14:sldIdLst>
         </p14:section>
-        <p14:section name="Read-along" id="{d8de9e6b-6aaf-e65f-44ea-d483589dfd50}">
+        <p14:section name="Read-along" id="{fe427b21-1a25-9dc6-1e0a-1fe0433ecf53}">
           <p14:sldIdLst>
             <p14:sldId id="261"/>
             <p14:sldId id="262"/>
           </p14:sldIdLst>
         </p14:section>
-        <p14:section name="Teach" id="{75122855-5497-9eed-a0f9-3d4c59f0eca5}">
+        <p14:section name="Teach" id="{46a95d92-eff9-aebf-f1c0-37f2bdd1f929}">
           <p14:sldIdLst>
             <p14:sldId id="263"/>
             <p14:sldId id="264"/>
@@ -160,7 +160,7 @@
             <p14:sldId id="268"/>
           </p14:sldIdLst>
         </p14:section>
-        <p14:section name="Routes" id="{38f09c73-426a-6f65-5e12-c7c34458d5b9}">
+        <p14:section name="Routes" id="{23f45ad2-f641-6f93-6fa5-f949bcde5485}">
           <p14:sldIdLst>
             <p14:sldId id="269"/>
             <p14:sldId id="270"/>
@@ -168,12 +168,12 @@
             <p14:sldId id="272"/>
           </p14:sldIdLst>
         </p14:section>
-        <p14:section name="Close" id="{e2b969a9-a090-2df1-c787-447c9f46c547}">
+        <p14:section name="Close" id="{fadea779-27cc-05e4-6f04-68f26c49de5a}">
           <p14:sldIdLst>
             <p14:sldId id="273"/>
           </p14:sldIdLst>
         </p14:section>
-        <p14:section name="Answers" id="{d07c5c0b-6293-f22c-0617-aab9f16cb3af}">
+        <p14:section name="Answers" id="{f27d6196-9661-ed1e-2e85-df4a0ec8c13b}">
           <p14:sldIdLst>
             <p14:sldId id="274"/>
             <p14:sldId id="275"/>
@@ -676,7 +676,7 @@
             <a:r>
               <a:rPr lang="en-US" dirty="0"/>
               <a:t>Teach — Four-figure grid references: along the corridor and up the stairs. Say it in your own words, then check understanding with a quick question: ask a pupil from the pre-teach group first, since they met these words and ideas before the lesson. Pupils try to recall before you re-explain.
-A four-figure grid reference names one whole square. The rule is that you do the bottom numbers first and the numbers up the side second. The deck's way of remembering it is along the corridor and then up the stairs. First find the line on the left-hand side of your square and read its number from the bottom edge. Then find the line along the bottom of your square and read its number from the side. Write the two numbers together, with no gap.
+A four-figure grid reference names one whole square. The rule is simple: read the number along the bottom edge first, then the number up the side. The deck's way of remembering it is along the corridor and then up the stairs. First find the line on the left-hand side of your square and read its number from the bottom edge. Then find the line along the bottom of your square and read its number from the side. Write the two numbers together, with no gap.
 Take the square whose left-hand line is 08 and whose bottom line is 21. Along the corridor gives 08; up the stairs gives 21; the grid reference is 0821. The square to the right of it is 0921, and the square above it is 0822. Notice that the reference always names the bottom-left corner of the square. Everything inside that square shares the same four-figure reference.
 The most common mistake is to read the numbers the wrong way round. 0821 and 2108 are different squares, and on a real map 2108 may be miles away or not on the sheet at all. The second most common mistake is to read the line on the right of the square instead of the left. Always use the corner nearest the bottom left.
 Worked example — model it step by step, thinking aloud: A symbol sits in the square to the right of easting line 13 and above northing line 24. What is its four-figure grid reference? (1) Along the corridor first: the line on the left of the square is 13. (2) Up the stairs second: the line along the bottom of the square is 24. (3) Put them together, eastings first: 1324. (4) Check: 2413 would be the wrong way round. Corridor before stairs. Answer: 1324.
@@ -2444,7 +2444,7 @@
             <a:r>
               <a:rPr lang="en-US" dirty="0"/>
               <a:t>Teach — Four-figure grid references: along the corridor and up the stairs. Say it in your own words, then check understanding with a quick question: ask a pupil from the pre-teach group first, since they met these words and ideas before the lesson. Pupils try to recall before you re-explain.
-A four-figure grid reference names one whole square. The rule is that you do the bottom numbers first and the numbers up the side second. The deck's way of remembering it is along the corridor and then up the stairs. First find the line on the left-hand side of your square and read its number from the bottom edge. Then find the line along the bottom of your square and read its number from the side. Write the two numbers together, with no gap.
+A four-figure grid reference names one whole square. The rule is simple: read the number along the bottom edge first, then the number up the side. The deck's way of remembering it is along the corridor and then up the stairs. First find the line on the left-hand side of your square and read its number from the bottom edge. Then find the line along the bottom of your square and read its number from the side. Write the two numbers together, with no gap.
 Take the square whose left-hand line is 08 and whose bottom line is 21. Along the corridor gives 08; up the stairs gives 21; the grid reference is 0821. The square to the right of it is 0921, and the square above it is 0822. Notice that the reference always names the bottom-left corner of the square. Everything inside that square shares the same four-figure reference.
 The most common mistake is to read the numbers the wrong way round. 0821 and 2108 are different squares, and on a real map 2108 may be miles away or not on the sheet at all. The second most common mistake is to read the line on the right of the square instead of the left. Always use the corner nearest the bottom left.
 Worked example — model it step by step, thinking aloud: A symbol sits in the square to the right of easting line 13 and above northing line 24. What is its four-figure grid reference? (1) Along the corridor first: the line on the left of the square is 13. (2) Up the stairs second: the line along the bottom of the square is 24. (3) Put them together, eastings first: 1324. (4) Check: 2413 would be the wrong way round. Corridor before stairs. Answer: 1324.
@@ -18600,7 +18600,7 @@
               <a:buNone/>
             </a:pPr>
             <a:r>
-              <a:rPr lang="en-US" sz="2400" dirty="0">
+              <a:rPr lang="en-US" sz="2200" dirty="0">
                 <a:solidFill>
                   <a:srgbClr val="1E2229"/>
                 </a:solidFill>
@@ -18608,9 +18608,9 @@
                 <a:ea typeface="Calibri" pitchFamily="34" charset="-122"/>
                 <a:cs typeface="Calibri" pitchFamily="34" charset="-120"/>
               </a:rPr>
-              <a:t>A four-figure grid reference names one whole square. The rule is that you do the bottom numbers first and the numbers up the side second.</a:t>
-            </a:r>
-            <a:endParaRPr lang="en-US" sz="2400" dirty="0"/>
+              <a:t>A four-figure grid reference names one whole square. The rule is simple: read the number along the bottom edge first, then the number up the side.</a:t>
+            </a:r>
+            <a:endParaRPr lang="en-US" sz="2200" dirty="0"/>
           </a:p>
         </p:txBody>
       </p:sp>
@@ -18720,7 +18720,7 @@
               <a:buNone/>
             </a:pPr>
             <a:r>
-              <a:rPr lang="en-US" sz="2400" dirty="0">
+              <a:rPr lang="en-US" sz="2200" dirty="0">
                 <a:solidFill>
                   <a:srgbClr val="1E2229"/>
                 </a:solidFill>
@@ -18730,7 +18730,7 @@
               </a:rPr>
               <a:t>Take the square whose left-hand line is 08 and whose bottom line is 21.</a:t>
             </a:r>
-            <a:endParaRPr lang="en-US" sz="2400" dirty="0"/>
+            <a:endParaRPr lang="en-US" sz="2200" dirty="0"/>
           </a:p>
         </p:txBody>
       </p:sp>
@@ -18840,7 +18840,7 @@
               <a:buNone/>
             </a:pPr>
             <a:r>
-              <a:rPr lang="en-US" sz="2400" dirty="0">
+              <a:rPr lang="en-US" sz="2200" dirty="0">
                 <a:solidFill>
                   <a:srgbClr val="1E2229"/>
                 </a:solidFill>
@@ -18850,7 +18850,7 @@
               </a:rPr>
               <a:t>The most common mistake is to read the numbers the wrong way round.</a:t>
             </a:r>
-            <a:endParaRPr lang="en-US" sz="2400" dirty="0"/>
+            <a:endParaRPr lang="en-US" sz="2200" dirty="0"/>
           </a:p>
         </p:txBody>
       </p:sp>
